--- a/assets/Wrexlyn-Pitch-Deck.pptx
+++ b/assets/Wrexlyn-Pitch-Deck.pptx
@@ -6084,7 +6084,7 @@
                 <a:ea typeface="Calibri" pitchFamily="34" charset="-122"/>
                 <a:cs typeface="Calibri" pitchFamily="34" charset="-120"/>
               </a:rPr>
-              <a:t>The top-level file listing, package.json, and README load automatically on startup — no list_dir needed just to orient.</a:t>
+              <a:t>The top-level file listing, package.json, and README load automatically on startup — no manual directory listing needed just to orient.</a:t>
             </a:r>
             <a:endParaRPr lang="en-US" sz="1050" dirty="0"/>
           </a:p>
@@ -7212,7 +7212,7 @@
                 <a:ea typeface="Calibri" pitchFamily="34" charset="-122"/>
                 <a:cs typeface="Calibri" pitchFamily="34" charset="-120"/>
               </a:rPr>
-              <a:t>Real, structured files — not write_file pretending to be a document generator</a:t>
+              <a:t>Real, structured files — not a generic file write pretending to be a document generator</a:t>
             </a:r>
             <a:endParaRPr lang="en-US" sz="2600" dirty="0"/>
           </a:p>
